--- a/charts.pptx
+++ b/charts.pptx
@@ -201,7 +201,7 @@
           <a:p>
             <a:fld id="{ECEA55E5-E2D9-5748-AB54-784F0CB29B2E}" type="datetimeFigureOut">
               <a:rPr lang="en-US" smtClean="0"/>
-              <a:t>8/3/25</a:t>
+              <a:t>8/14/25</a:t>
             </a:fld>
             <a:endParaRPr lang="en-US"/>
           </a:p>
@@ -723,7 +723,7 @@
           <a:p>
             <a:fld id="{9D7A9D97-9CA5-8446-8AC6-CC2178C3F7CD}" type="datetimeFigureOut">
               <a:rPr lang="en-US" smtClean="0"/>
-              <a:t>8/3/25</a:t>
+              <a:t>8/14/25</a:t>
             </a:fld>
             <a:endParaRPr lang="en-US"/>
           </a:p>
@@ -921,7 +921,7 @@
           <a:p>
             <a:fld id="{9D7A9D97-9CA5-8446-8AC6-CC2178C3F7CD}" type="datetimeFigureOut">
               <a:rPr lang="en-US" smtClean="0"/>
-              <a:t>8/3/25</a:t>
+              <a:t>8/14/25</a:t>
             </a:fld>
             <a:endParaRPr lang="en-US"/>
           </a:p>
@@ -1129,7 +1129,7 @@
           <a:p>
             <a:fld id="{9D7A9D97-9CA5-8446-8AC6-CC2178C3F7CD}" type="datetimeFigureOut">
               <a:rPr lang="en-US" smtClean="0"/>
-              <a:t>8/3/25</a:t>
+              <a:t>8/14/25</a:t>
             </a:fld>
             <a:endParaRPr lang="en-US"/>
           </a:p>
@@ -1327,7 +1327,7 @@
           <a:p>
             <a:fld id="{9D7A9D97-9CA5-8446-8AC6-CC2178C3F7CD}" type="datetimeFigureOut">
               <a:rPr lang="en-US" smtClean="0"/>
-              <a:t>8/3/25</a:t>
+              <a:t>8/14/25</a:t>
             </a:fld>
             <a:endParaRPr lang="en-US"/>
           </a:p>
@@ -1602,7 +1602,7 @@
           <a:p>
             <a:fld id="{9D7A9D97-9CA5-8446-8AC6-CC2178C3F7CD}" type="datetimeFigureOut">
               <a:rPr lang="en-US" smtClean="0"/>
-              <a:t>8/3/25</a:t>
+              <a:t>8/14/25</a:t>
             </a:fld>
             <a:endParaRPr lang="en-US"/>
           </a:p>
@@ -1867,7 +1867,7 @@
           <a:p>
             <a:fld id="{9D7A9D97-9CA5-8446-8AC6-CC2178C3F7CD}" type="datetimeFigureOut">
               <a:rPr lang="en-US" smtClean="0"/>
-              <a:t>8/3/25</a:t>
+              <a:t>8/14/25</a:t>
             </a:fld>
             <a:endParaRPr lang="en-US"/>
           </a:p>
@@ -2279,7 +2279,7 @@
           <a:p>
             <a:fld id="{9D7A9D97-9CA5-8446-8AC6-CC2178C3F7CD}" type="datetimeFigureOut">
               <a:rPr lang="en-US" smtClean="0"/>
-              <a:t>8/3/25</a:t>
+              <a:t>8/14/25</a:t>
             </a:fld>
             <a:endParaRPr lang="en-US"/>
           </a:p>
@@ -2420,7 +2420,7 @@
           <a:p>
             <a:fld id="{9D7A9D97-9CA5-8446-8AC6-CC2178C3F7CD}" type="datetimeFigureOut">
               <a:rPr lang="en-US" smtClean="0"/>
-              <a:t>8/3/25</a:t>
+              <a:t>8/14/25</a:t>
             </a:fld>
             <a:endParaRPr lang="en-US"/>
           </a:p>
@@ -2533,7 +2533,7 @@
           <a:p>
             <a:fld id="{9D7A9D97-9CA5-8446-8AC6-CC2178C3F7CD}" type="datetimeFigureOut">
               <a:rPr lang="en-US" smtClean="0"/>
-              <a:t>8/3/25</a:t>
+              <a:t>8/14/25</a:t>
             </a:fld>
             <a:endParaRPr lang="en-US"/>
           </a:p>
@@ -2844,7 +2844,7 @@
           <a:p>
             <a:fld id="{9D7A9D97-9CA5-8446-8AC6-CC2178C3F7CD}" type="datetimeFigureOut">
               <a:rPr lang="en-US" smtClean="0"/>
-              <a:t>8/3/25</a:t>
+              <a:t>8/14/25</a:t>
             </a:fld>
             <a:endParaRPr lang="en-US"/>
           </a:p>
@@ -3132,7 +3132,7 @@
           <a:p>
             <a:fld id="{9D7A9D97-9CA5-8446-8AC6-CC2178C3F7CD}" type="datetimeFigureOut">
               <a:rPr lang="en-US" smtClean="0"/>
-              <a:t>8/3/25</a:t>
+              <a:t>8/14/25</a:t>
             </a:fld>
             <a:endParaRPr lang="en-US"/>
           </a:p>
@@ -3373,7 +3373,7 @@
           <a:p>
             <a:fld id="{9D7A9D97-9CA5-8446-8AC6-CC2178C3F7CD}" type="datetimeFigureOut">
               <a:rPr lang="en-US" smtClean="0"/>
-              <a:t>8/3/25</a:t>
+              <a:t>8/14/25</a:t>
             </a:fld>
             <a:endParaRPr lang="en-US"/>
           </a:p>
@@ -3850,6 +3850,20 @@
               </a:solidFill>
             </a:endParaRPr>
           </a:p>
+          <a:p>
+            <a:pPr algn="ctr"/>
+            <a:r>
+              <a:rPr lang="en-US" sz="1400" dirty="0">
+                <a:solidFill>
+                  <a:schemeClr val="tx1">
+                    <a:lumMod val="85000"/>
+                    <a:lumOff val="15000"/>
+                  </a:schemeClr>
+                </a:solidFill>
+              </a:rPr>
+              <a:t>(working area)</a:t>
+            </a:r>
+          </a:p>
         </p:txBody>
       </p:sp>
       <p:sp>
@@ -3899,12 +3913,31 @@
           <a:p>
             <a:pPr algn="ctr"/>
             <a:r>
-              <a:rPr lang="en-US" sz="2000" dirty="0">
+              <a:rPr lang="ru-RU" sz="2000" dirty="0">
                 <a:solidFill>
                   <a:sysClr val="windowText" lastClr="000000"/>
                 </a:solidFill>
               </a:rPr>
-              <a:t>Staging</a:t>
+              <a:t>Индекс</a:t>
+            </a:r>
+            <a:endParaRPr lang="en-US" sz="2000" dirty="0">
+              <a:solidFill>
+                <a:sysClr val="windowText" lastClr="000000"/>
+              </a:solidFill>
+            </a:endParaRPr>
+          </a:p>
+          <a:p>
+            <a:pPr algn="ctr"/>
+            <a:r>
+              <a:rPr lang="en-US" sz="1400" dirty="0">
+                <a:solidFill>
+                  <a:schemeClr val="tx1">
+                    <a:lumMod val="85000"/>
+                    <a:lumOff val="15000"/>
+                  </a:schemeClr>
+                </a:solidFill>
+              </a:rPr>
+              <a:t>(staging area)</a:t>
             </a:r>
           </a:p>
         </p:txBody>
@@ -3968,6 +4001,20 @@
                 <a:sysClr val="windowText" lastClr="000000"/>
               </a:solidFill>
             </a:endParaRPr>
+          </a:p>
+          <a:p>
+            <a:pPr algn="ctr"/>
+            <a:r>
+              <a:rPr lang="en-US" sz="1400" dirty="0">
+                <a:solidFill>
+                  <a:schemeClr val="tx1">
+                    <a:lumMod val="85000"/>
+                    <a:lumOff val="15000"/>
+                  </a:schemeClr>
+                </a:solidFill>
+              </a:rPr>
+              <a:t>(repository)</a:t>
+            </a:r>
           </a:p>
         </p:txBody>
       </p:sp>
@@ -4127,8 +4174,8 @@
         </p:nvSpPr>
         <p:spPr>
           <a:xfrm>
-            <a:off x="5624560" y="3235295"/>
-            <a:ext cx="2125903" cy="400110"/>
+            <a:off x="5964800" y="3121223"/>
+            <a:ext cx="2286000" cy="615553"/>
           </a:xfrm>
           <a:prstGeom prst="rect">
             <a:avLst/>
@@ -4136,7 +4183,7 @@
           <a:noFill/>
         </p:spPr>
         <p:txBody>
-          <a:bodyPr wrap="none" rtlCol="0">
+          <a:bodyPr wrap="square" rtlCol="0">
             <a:spAutoFit/>
           </a:bodyPr>
           <a:lstStyle/>
@@ -4145,7 +4192,29 @@
               <a:rPr lang="ru-RU" sz="2000" dirty="0"/>
               <a:t>Создаем коммит</a:t>
             </a:r>
-            <a:endParaRPr lang="en-US" dirty="0"/>
+            <a:endParaRPr lang="en-US" sz="2000" dirty="0"/>
+          </a:p>
+          <a:p>
+            <a:pPr algn="ctr"/>
+            <a:r>
+              <a:rPr lang="en-US" sz="1400" dirty="0">
+                <a:solidFill>
+                  <a:schemeClr val="tx1">
+                    <a:lumMod val="85000"/>
+                    <a:lumOff val="15000"/>
+                  </a:schemeClr>
+                </a:solidFill>
+              </a:rPr>
+              <a:t>(commit)</a:t>
+            </a:r>
+            <a:endParaRPr lang="en-US" sz="1200" dirty="0">
+              <a:solidFill>
+                <a:schemeClr val="tx1">
+                  <a:lumMod val="85000"/>
+                  <a:lumOff val="15000"/>
+                </a:schemeClr>
+              </a:solidFill>
+            </a:endParaRPr>
           </a:p>
         </p:txBody>
       </p:sp>
@@ -4163,8 +4232,8 @@
         </p:nvSpPr>
         <p:spPr>
           <a:xfrm>
-            <a:off x="5230112" y="949975"/>
-            <a:ext cx="2503314" cy="400110"/>
+            <a:off x="5417131" y="1009706"/>
+            <a:ext cx="2541080" cy="400110"/>
           </a:xfrm>
           <a:prstGeom prst="rect">
             <a:avLst/>
@@ -4179,13 +4248,9 @@
           <a:p>
             <a:r>
               <a:rPr lang="ru-RU" sz="2000" dirty="0"/>
-              <a:t>Добавляем в </a:t>
-            </a:r>
-            <a:r>
-              <a:rPr lang="en-US" sz="2000" dirty="0"/>
-              <a:t>staging</a:t>
-            </a:r>
-            <a:endParaRPr lang="en-US" dirty="0"/>
+              <a:t>Добавляем в индекс</a:t>
+            </a:r>
+            <a:endParaRPr lang="en-US" sz="2000" dirty="0"/>
           </a:p>
         </p:txBody>
       </p:sp>
